--- a/reference_doc/pcie/notebook/PCIE协议-事务层-3.0.pptx
+++ b/reference_doc/pcie/notebook/PCIE协议-事务层-3.0.pptx
@@ -5,7 +5,7 @@
     <p:sldMasterId id="2147483648" r:id="rId1"/>
   </p:sldMasterIdLst>
   <p:notesMasterIdLst>
-    <p:notesMasterId r:id="rId30"/>
+    <p:notesMasterId r:id="rId32"/>
   </p:notesMasterIdLst>
   <p:sldIdLst>
     <p:sldId id="256" r:id="rId2"/>
@@ -34,8 +34,10 @@
     <p:sldId id="280" r:id="rId25"/>
     <p:sldId id="281" r:id="rId26"/>
     <p:sldId id="282" r:id="rId27"/>
-    <p:sldId id="276" r:id="rId28"/>
-    <p:sldId id="277" r:id="rId29"/>
+    <p:sldId id="284" r:id="rId28"/>
+    <p:sldId id="285" r:id="rId29"/>
+    <p:sldId id="276" r:id="rId30"/>
+    <p:sldId id="277" r:id="rId31"/>
   </p:sldIdLst>
   <p:sldSz cx="12192000" cy="6858000"/>
   <p:notesSz cx="6858000" cy="9144000"/>
@@ -224,7 +226,7 @@
           <a:p>
             <a:fld id="{10AA8A96-094B-4A18-81A3-C48DB1DF3CA0}" type="datetimeFigureOut">
               <a:rPr lang="zh-CN" altLang="en-US" smtClean="0"/>
-              <a:t>2025/5/12</a:t>
+              <a:t>2025/6/3</a:t>
             </a:fld>
             <a:endParaRPr lang="zh-CN" altLang="en-US"/>
           </a:p>
@@ -5489,6 +5491,90 @@
 </p:notes>
 </file>
 
+<file path=ppt/notesSlides/notesSlide8.xml><?xml version="1.0" encoding="utf-8"?>
+<p:notes xmlns:a="http://schemas.openxmlformats.org/drawingml/2006/main" xmlns:r="http://schemas.openxmlformats.org/officeDocument/2006/relationships" xmlns:p="http://schemas.openxmlformats.org/presentationml/2006/main">
+  <p:cSld>
+    <p:spTree>
+      <p:nvGrpSpPr>
+        <p:cNvPr id="1" name=""/>
+        <p:cNvGrpSpPr/>
+        <p:nvPr/>
+      </p:nvGrpSpPr>
+      <p:grpSpPr>
+        <a:xfrm>
+          <a:off x="0" y="0"/>
+          <a:ext cx="0" cy="0"/>
+          <a:chOff x="0" y="0"/>
+          <a:chExt cx="0" cy="0"/>
+        </a:xfrm>
+      </p:grpSpPr>
+      <p:sp>
+        <p:nvSpPr>
+          <p:cNvPr id="2" name="幻灯片图像占位符 1"/>
+          <p:cNvSpPr>
+            <a:spLocks noGrp="1" noRot="1" noChangeAspect="1"/>
+          </p:cNvSpPr>
+          <p:nvPr>
+            <p:ph type="sldImg"/>
+          </p:nvPr>
+        </p:nvSpPr>
+        <p:spPr/>
+      </p:sp>
+      <p:sp>
+        <p:nvSpPr>
+          <p:cNvPr id="3" name="备注占位符 2"/>
+          <p:cNvSpPr>
+            <a:spLocks noGrp="1"/>
+          </p:cNvSpPr>
+          <p:nvPr>
+            <p:ph type="body" idx="1"/>
+          </p:nvPr>
+        </p:nvSpPr>
+        <p:spPr/>
+        <p:txBody>
+          <a:bodyPr/>
+          <a:lstStyle/>
+          <a:p>
+            <a:endParaRPr lang="zh-CN" altLang="en-US" dirty="0"/>
+          </a:p>
+        </p:txBody>
+      </p:sp>
+      <p:sp>
+        <p:nvSpPr>
+          <p:cNvPr id="4" name="灯片编号占位符 3"/>
+          <p:cNvSpPr>
+            <a:spLocks noGrp="1"/>
+          </p:cNvSpPr>
+          <p:nvPr>
+            <p:ph type="sldNum" sz="quarter" idx="5"/>
+          </p:nvPr>
+        </p:nvSpPr>
+        <p:spPr/>
+        <p:txBody>
+          <a:bodyPr/>
+          <a:lstStyle/>
+          <a:p>
+            <a:fld id="{AF94472F-BD2A-4751-A01F-F3704EC37309}" type="slidenum">
+              <a:rPr lang="zh-CN" altLang="en-US" smtClean="0"/>
+              <a:t>27</a:t>
+            </a:fld>
+            <a:endParaRPr lang="zh-CN" altLang="en-US"/>
+          </a:p>
+        </p:txBody>
+      </p:sp>
+    </p:spTree>
+    <p:extLst>
+      <p:ext uri="{BB962C8B-B14F-4D97-AF65-F5344CB8AC3E}">
+        <p14:creationId xmlns:p14="http://schemas.microsoft.com/office/powerpoint/2010/main" val="882115449"/>
+      </p:ext>
+    </p:extLst>
+  </p:cSld>
+  <p:clrMapOvr>
+    <a:masterClrMapping/>
+  </p:clrMapOvr>
+</p:notes>
+</file>
+
 <file path=ppt/slideLayouts/slideLayout1.xml><?xml version="1.0" encoding="utf-8"?>
 <p:sldLayout xmlns:a="http://schemas.openxmlformats.org/drawingml/2006/main" xmlns:r="http://schemas.openxmlformats.org/officeDocument/2006/relationships" xmlns:p="http://schemas.openxmlformats.org/presentationml/2006/main" type="title" preserve="1">
   <p:cSld name="标题幻灯片">
@@ -5636,7 +5722,7 @@
           <a:p>
             <a:fld id="{12CA9894-3BF6-4A35-BF81-E2CAC0244B39}" type="datetimeFigureOut">
               <a:rPr lang="zh-CN" altLang="en-US" smtClean="0"/>
-              <a:t>2025/5/12</a:t>
+              <a:t>2025/6/3</a:t>
             </a:fld>
             <a:endParaRPr lang="zh-CN" altLang="en-US"/>
           </a:p>
@@ -5834,7 +5920,7 @@
           <a:p>
             <a:fld id="{12CA9894-3BF6-4A35-BF81-E2CAC0244B39}" type="datetimeFigureOut">
               <a:rPr lang="zh-CN" altLang="en-US" smtClean="0"/>
-              <a:t>2025/5/12</a:t>
+              <a:t>2025/6/3</a:t>
             </a:fld>
             <a:endParaRPr lang="zh-CN" altLang="en-US"/>
           </a:p>
@@ -6042,7 +6128,7 @@
           <a:p>
             <a:fld id="{12CA9894-3BF6-4A35-BF81-E2CAC0244B39}" type="datetimeFigureOut">
               <a:rPr lang="zh-CN" altLang="en-US" smtClean="0"/>
-              <a:t>2025/5/12</a:t>
+              <a:t>2025/6/3</a:t>
             </a:fld>
             <a:endParaRPr lang="zh-CN" altLang="en-US"/>
           </a:p>
@@ -6240,7 +6326,7 @@
           <a:p>
             <a:fld id="{12CA9894-3BF6-4A35-BF81-E2CAC0244B39}" type="datetimeFigureOut">
               <a:rPr lang="zh-CN" altLang="en-US" smtClean="0"/>
-              <a:t>2025/5/12</a:t>
+              <a:t>2025/6/3</a:t>
             </a:fld>
             <a:endParaRPr lang="zh-CN" altLang="en-US"/>
           </a:p>
@@ -6515,7 +6601,7 @@
           <a:p>
             <a:fld id="{12CA9894-3BF6-4A35-BF81-E2CAC0244B39}" type="datetimeFigureOut">
               <a:rPr lang="zh-CN" altLang="en-US" smtClean="0"/>
-              <a:t>2025/5/12</a:t>
+              <a:t>2025/6/3</a:t>
             </a:fld>
             <a:endParaRPr lang="zh-CN" altLang="en-US"/>
           </a:p>
@@ -6780,7 +6866,7 @@
           <a:p>
             <a:fld id="{12CA9894-3BF6-4A35-BF81-E2CAC0244B39}" type="datetimeFigureOut">
               <a:rPr lang="zh-CN" altLang="en-US" smtClean="0"/>
-              <a:t>2025/5/12</a:t>
+              <a:t>2025/6/3</a:t>
             </a:fld>
             <a:endParaRPr lang="zh-CN" altLang="en-US"/>
           </a:p>
@@ -7192,7 +7278,7 @@
           <a:p>
             <a:fld id="{12CA9894-3BF6-4A35-BF81-E2CAC0244B39}" type="datetimeFigureOut">
               <a:rPr lang="zh-CN" altLang="en-US" smtClean="0"/>
-              <a:t>2025/5/12</a:t>
+              <a:t>2025/6/3</a:t>
             </a:fld>
             <a:endParaRPr lang="zh-CN" altLang="en-US"/>
           </a:p>
@@ -7333,7 +7419,7 @@
           <a:p>
             <a:fld id="{12CA9894-3BF6-4A35-BF81-E2CAC0244B39}" type="datetimeFigureOut">
               <a:rPr lang="zh-CN" altLang="en-US" smtClean="0"/>
-              <a:t>2025/5/12</a:t>
+              <a:t>2025/6/3</a:t>
             </a:fld>
             <a:endParaRPr lang="zh-CN" altLang="en-US"/>
           </a:p>
@@ -7446,7 +7532,7 @@
           <a:p>
             <a:fld id="{12CA9894-3BF6-4A35-BF81-E2CAC0244B39}" type="datetimeFigureOut">
               <a:rPr lang="zh-CN" altLang="en-US" smtClean="0"/>
-              <a:t>2025/5/12</a:t>
+              <a:t>2025/6/3</a:t>
             </a:fld>
             <a:endParaRPr lang="zh-CN" altLang="en-US"/>
           </a:p>
@@ -7757,7 +7843,7 @@
           <a:p>
             <a:fld id="{12CA9894-3BF6-4A35-BF81-E2CAC0244B39}" type="datetimeFigureOut">
               <a:rPr lang="zh-CN" altLang="en-US" smtClean="0"/>
-              <a:t>2025/5/12</a:t>
+              <a:t>2025/6/3</a:t>
             </a:fld>
             <a:endParaRPr lang="zh-CN" altLang="en-US"/>
           </a:p>
@@ -8045,7 +8131,7 @@
           <a:p>
             <a:fld id="{12CA9894-3BF6-4A35-BF81-E2CAC0244B39}" type="datetimeFigureOut">
               <a:rPr lang="zh-CN" altLang="en-US" smtClean="0"/>
-              <a:t>2025/5/12</a:t>
+              <a:t>2025/6/3</a:t>
             </a:fld>
             <a:endParaRPr lang="zh-CN" altLang="en-US"/>
           </a:p>
@@ -8286,7 +8372,7 @@
           <a:p>
             <a:fld id="{12CA9894-3BF6-4A35-BF81-E2CAC0244B39}" type="datetimeFigureOut">
               <a:rPr lang="zh-CN" altLang="en-US" smtClean="0"/>
-              <a:t>2025/5/12</a:t>
+              <a:t>2025/6/3</a:t>
             </a:fld>
             <a:endParaRPr lang="zh-CN" altLang="en-US"/>
           </a:p>
@@ -27604,6 +27690,132 @@
   <p:cSld>
     <p:spTree>
       <p:nvGrpSpPr>
+        <p:cNvPr id="1" name=""/>
+        <p:cNvGrpSpPr/>
+        <p:nvPr/>
+      </p:nvGrpSpPr>
+      <p:grpSpPr>
+        <a:xfrm>
+          <a:off x="0" y="0"/>
+          <a:ext cx="0" cy="0"/>
+          <a:chOff x="0" y="0"/>
+          <a:chExt cx="0" cy="0"/>
+        </a:xfrm>
+      </p:grpSpPr>
+      <p:pic>
+        <p:nvPicPr>
+          <p:cNvPr id="4" name="图片 3" descr="图示&#10;&#10;AI 生成的内容可能不正确。">
+            <a:extLst>
+              <a:ext uri="{FF2B5EF4-FFF2-40B4-BE49-F238E27FC236}">
+                <a16:creationId xmlns:a16="http://schemas.microsoft.com/office/drawing/2014/main" id="{A8FD8780-1963-E6C9-8BCE-8C2C47A7F854}"/>
+              </a:ext>
+            </a:extLst>
+          </p:cNvPr>
+          <p:cNvPicPr>
+            <a:picLocks noChangeAspect="1"/>
+          </p:cNvPicPr>
+          <p:nvPr/>
+        </p:nvPicPr>
+        <p:blipFill>
+          <a:blip r:embed="rId3"/>
+          <a:stretch>
+            <a:fillRect/>
+          </a:stretch>
+        </p:blipFill>
+        <p:spPr>
+          <a:xfrm>
+            <a:off x="1581969" y="-545"/>
+            <a:ext cx="9028062" cy="6858545"/>
+          </a:xfrm>
+          <a:prstGeom prst="rect">
+            <a:avLst/>
+          </a:prstGeom>
+        </p:spPr>
+      </p:pic>
+    </p:spTree>
+    <p:extLst>
+      <p:ext uri="{BB962C8B-B14F-4D97-AF65-F5344CB8AC3E}">
+        <p14:creationId xmlns:p14="http://schemas.microsoft.com/office/powerpoint/2010/main" val="2747703643"/>
+      </p:ext>
+    </p:extLst>
+  </p:cSld>
+  <p:clrMapOvr>
+    <a:masterClrMapping/>
+  </p:clrMapOvr>
+</p:sld>
+</file>
+
+<file path=ppt/slides/slide28.xml><?xml version="1.0" encoding="utf-8"?>
+<p:sld xmlns:a="http://schemas.openxmlformats.org/drawingml/2006/main" xmlns:r="http://schemas.openxmlformats.org/officeDocument/2006/relationships" xmlns:p="http://schemas.openxmlformats.org/presentationml/2006/main">
+  <p:cSld>
+    <p:spTree>
+      <p:nvGrpSpPr>
+        <p:cNvPr id="1" name="">
+          <a:extLst>
+            <a:ext uri="{FF2B5EF4-FFF2-40B4-BE49-F238E27FC236}">
+              <a16:creationId xmlns:a16="http://schemas.microsoft.com/office/drawing/2014/main" id="{7A4F065C-27B8-84A0-6158-E18EAF7DB1EA}"/>
+            </a:ext>
+          </a:extLst>
+        </p:cNvPr>
+        <p:cNvGrpSpPr/>
+        <p:nvPr/>
+      </p:nvGrpSpPr>
+      <p:grpSpPr>
+        <a:xfrm>
+          <a:off x="0" y="0"/>
+          <a:ext cx="0" cy="0"/>
+          <a:chOff x="0" y="0"/>
+          <a:chExt cx="0" cy="0"/>
+        </a:xfrm>
+      </p:grpSpPr>
+      <p:pic>
+        <p:nvPicPr>
+          <p:cNvPr id="2" name="图片 1" descr="图示&#10;&#10;AI 生成的内容可能不正确。">
+            <a:extLst>
+              <a:ext uri="{FF2B5EF4-FFF2-40B4-BE49-F238E27FC236}">
+                <a16:creationId xmlns:a16="http://schemas.microsoft.com/office/drawing/2014/main" id="{6CC668DA-2B02-DC30-70B6-5A5A6D6FEBFB}"/>
+              </a:ext>
+            </a:extLst>
+          </p:cNvPr>
+          <p:cNvPicPr>
+            <a:picLocks noChangeAspect="1"/>
+          </p:cNvPicPr>
+          <p:nvPr/>
+        </p:nvPicPr>
+        <p:blipFill>
+          <a:blip r:embed="rId2"/>
+          <a:stretch>
+            <a:fillRect/>
+          </a:stretch>
+        </p:blipFill>
+        <p:spPr>
+          <a:xfrm>
+            <a:off x="2275669" y="0"/>
+            <a:ext cx="7640661" cy="6858000"/>
+          </a:xfrm>
+          <a:prstGeom prst="rect">
+            <a:avLst/>
+          </a:prstGeom>
+        </p:spPr>
+      </p:pic>
+    </p:spTree>
+    <p:extLst>
+      <p:ext uri="{BB962C8B-B14F-4D97-AF65-F5344CB8AC3E}">
+        <p14:creationId xmlns:p14="http://schemas.microsoft.com/office/powerpoint/2010/main" val="1871481770"/>
+      </p:ext>
+    </p:extLst>
+  </p:cSld>
+  <p:clrMapOvr>
+    <a:masterClrMapping/>
+  </p:clrMapOvr>
+</p:sld>
+</file>
+
+<file path=ppt/slides/slide29.xml><?xml version="1.0" encoding="utf-8"?>
+<p:sld xmlns:a="http://schemas.openxmlformats.org/drawingml/2006/main" xmlns:r="http://schemas.openxmlformats.org/officeDocument/2006/relationships" xmlns:p="http://schemas.openxmlformats.org/presentationml/2006/main">
+  <p:cSld>
+    <p:spTree>
+      <p:nvGrpSpPr>
         <p:cNvPr id="1" name="">
           <a:extLst>
             <a:ext uri="{FF2B5EF4-FFF2-40B4-BE49-F238E27FC236}">
@@ -27626,42 +27838,6 @@
     <p:extLst>
       <p:ext uri="{BB962C8B-B14F-4D97-AF65-F5344CB8AC3E}">
         <p14:creationId xmlns:p14="http://schemas.microsoft.com/office/powerpoint/2010/main" val="4029139996"/>
-      </p:ext>
-    </p:extLst>
-  </p:cSld>
-  <p:clrMapOvr>
-    <a:masterClrMapping/>
-  </p:clrMapOvr>
-</p:sld>
-</file>
-
-<file path=ppt/slides/slide28.xml><?xml version="1.0" encoding="utf-8"?>
-<p:sld xmlns:a="http://schemas.openxmlformats.org/drawingml/2006/main" xmlns:r="http://schemas.openxmlformats.org/officeDocument/2006/relationships" xmlns:p="http://schemas.openxmlformats.org/presentationml/2006/main">
-  <p:cSld>
-    <p:spTree>
-      <p:nvGrpSpPr>
-        <p:cNvPr id="1" name="">
-          <a:extLst>
-            <a:ext uri="{FF2B5EF4-FFF2-40B4-BE49-F238E27FC236}">
-              <a16:creationId xmlns:a16="http://schemas.microsoft.com/office/drawing/2014/main" id="{99A5108B-12BA-3FD4-F5B8-7EE012541E13}"/>
-            </a:ext>
-          </a:extLst>
-        </p:cNvPr>
-        <p:cNvGrpSpPr/>
-        <p:nvPr/>
-      </p:nvGrpSpPr>
-      <p:grpSpPr>
-        <a:xfrm>
-          <a:off x="0" y="0"/>
-          <a:ext cx="0" cy="0"/>
-          <a:chOff x="0" y="0"/>
-          <a:chExt cx="0" cy="0"/>
-        </a:xfrm>
-      </p:grpSpPr>
-    </p:spTree>
-    <p:extLst>
-      <p:ext uri="{BB962C8B-B14F-4D97-AF65-F5344CB8AC3E}">
-        <p14:creationId xmlns:p14="http://schemas.microsoft.com/office/powerpoint/2010/main" val="3520829242"/>
       </p:ext>
     </p:extLst>
   </p:cSld>
@@ -28350,6 +28526,42 @@
     <p:extLst>
       <p:ext uri="{BB962C8B-B14F-4D97-AF65-F5344CB8AC3E}">
         <p14:creationId xmlns:p14="http://schemas.microsoft.com/office/powerpoint/2010/main" val="1297604288"/>
+      </p:ext>
+    </p:extLst>
+  </p:cSld>
+  <p:clrMapOvr>
+    <a:masterClrMapping/>
+  </p:clrMapOvr>
+</p:sld>
+</file>
+
+<file path=ppt/slides/slide30.xml><?xml version="1.0" encoding="utf-8"?>
+<p:sld xmlns:a="http://schemas.openxmlformats.org/drawingml/2006/main" xmlns:r="http://schemas.openxmlformats.org/officeDocument/2006/relationships" xmlns:p="http://schemas.openxmlformats.org/presentationml/2006/main">
+  <p:cSld>
+    <p:spTree>
+      <p:nvGrpSpPr>
+        <p:cNvPr id="1" name="">
+          <a:extLst>
+            <a:ext uri="{FF2B5EF4-FFF2-40B4-BE49-F238E27FC236}">
+              <a16:creationId xmlns:a16="http://schemas.microsoft.com/office/drawing/2014/main" id="{99A5108B-12BA-3FD4-F5B8-7EE012541E13}"/>
+            </a:ext>
+          </a:extLst>
+        </p:cNvPr>
+        <p:cNvGrpSpPr/>
+        <p:nvPr/>
+      </p:nvGrpSpPr>
+      <p:grpSpPr>
+        <a:xfrm>
+          <a:off x="0" y="0"/>
+          <a:ext cx="0" cy="0"/>
+          <a:chOff x="0" y="0"/>
+          <a:chExt cx="0" cy="0"/>
+        </a:xfrm>
+      </p:grpSpPr>
+    </p:spTree>
+    <p:extLst>
+      <p:ext uri="{BB962C8B-B14F-4D97-AF65-F5344CB8AC3E}">
+        <p14:creationId xmlns:p14="http://schemas.microsoft.com/office/powerpoint/2010/main" val="3520829242"/>
       </p:ext>
     </p:extLst>
   </p:cSld>

--- a/reference_doc/pcie/notebook/PCIE协议-事务层-3.0.pptx
+++ b/reference_doc/pcie/notebook/PCIE协议-事务层-3.0.pptx
@@ -226,7 +226,7 @@
           <a:p>
             <a:fld id="{10AA8A96-094B-4A18-81A3-C48DB1DF3CA0}" type="datetimeFigureOut">
               <a:rPr lang="zh-CN" altLang="en-US" smtClean="0"/>
-              <a:t>2025/6/3</a:t>
+              <a:t>2025/6/26</a:t>
             </a:fld>
             <a:endParaRPr lang="zh-CN" altLang="en-US"/>
           </a:p>
@@ -3612,6 +3612,105 @@
           <a:lstStyle/>
           <a:p>
             <a:r>
+              <a:rPr lang="en-US" altLang="zh-CN" dirty="0"/>
+              <a:t>BE</a:t>
+            </a:r>
+            <a:r>
+              <a:rPr lang="zh-CN" altLang="en-US" dirty="0"/>
+              <a:t>（</a:t>
+            </a:r>
+            <a:r>
+              <a:rPr lang="en-US" altLang="zh-CN" dirty="0"/>
+              <a:t>Byte Enable</a:t>
+            </a:r>
+            <a:r>
+              <a:rPr lang="zh-CN" altLang="en-US"/>
+              <a:t>）的作用用于指示哪些字节是有效的，哪些是不需要访问的，从而支持非对其访问</a:t>
+            </a:r>
+          </a:p>
+        </p:txBody>
+      </p:sp>
+      <p:sp>
+        <p:nvSpPr>
+          <p:cNvPr id="4" name="灯片编号占位符 3"/>
+          <p:cNvSpPr>
+            <a:spLocks noGrp="1"/>
+          </p:cNvSpPr>
+          <p:nvPr>
+            <p:ph type="sldNum" sz="quarter" idx="5"/>
+          </p:nvPr>
+        </p:nvSpPr>
+        <p:spPr/>
+        <p:txBody>
+          <a:bodyPr/>
+          <a:lstStyle/>
+          <a:p>
+            <a:fld id="{FEB3D97D-0215-411C-B390-5D5891D681D8}" type="slidenum">
+              <a:rPr lang="zh-CN" altLang="en-US" smtClean="0"/>
+              <a:t>13</a:t>
+            </a:fld>
+            <a:endParaRPr lang="zh-CN" altLang="en-US"/>
+          </a:p>
+        </p:txBody>
+      </p:sp>
+    </p:spTree>
+    <p:extLst>
+      <p:ext uri="{BB962C8B-B14F-4D97-AF65-F5344CB8AC3E}">
+        <p14:creationId xmlns:p14="http://schemas.microsoft.com/office/powerpoint/2010/main" val="320476333"/>
+      </p:ext>
+    </p:extLst>
+  </p:cSld>
+  <p:clrMapOvr>
+    <a:masterClrMapping/>
+  </p:clrMapOvr>
+</p:notes>
+</file>
+
+<file path=ppt/notesSlides/notesSlide5.xml><?xml version="1.0" encoding="utf-8"?>
+<p:notes xmlns:a="http://schemas.openxmlformats.org/drawingml/2006/main" xmlns:r="http://schemas.openxmlformats.org/officeDocument/2006/relationships" xmlns:p="http://schemas.openxmlformats.org/presentationml/2006/main">
+  <p:cSld>
+    <p:spTree>
+      <p:nvGrpSpPr>
+        <p:cNvPr id="1" name=""/>
+        <p:cNvGrpSpPr/>
+        <p:nvPr/>
+      </p:nvGrpSpPr>
+      <p:grpSpPr>
+        <a:xfrm>
+          <a:off x="0" y="0"/>
+          <a:ext cx="0" cy="0"/>
+          <a:chOff x="0" y="0"/>
+          <a:chExt cx="0" cy="0"/>
+        </a:xfrm>
+      </p:grpSpPr>
+      <p:sp>
+        <p:nvSpPr>
+          <p:cNvPr id="2" name="幻灯片图像占位符 1"/>
+          <p:cNvSpPr>
+            <a:spLocks noGrp="1" noRot="1" noChangeAspect="1"/>
+          </p:cNvSpPr>
+          <p:nvPr>
+            <p:ph type="sldImg"/>
+          </p:nvPr>
+        </p:nvSpPr>
+        <p:spPr/>
+      </p:sp>
+      <p:sp>
+        <p:nvSpPr>
+          <p:cNvPr id="3" name="备注占位符 2"/>
+          <p:cNvSpPr>
+            <a:spLocks noGrp="1"/>
+          </p:cNvSpPr>
+          <p:nvPr>
+            <p:ph type="body" idx="1"/>
+          </p:nvPr>
+        </p:nvSpPr>
+        <p:spPr/>
+        <p:txBody>
+          <a:bodyPr/>
+          <a:lstStyle/>
+          <a:p>
+            <a:r>
               <a:rPr lang="zh-CN" altLang="en-US" sz="1800" b="0" i="0" dirty="0">
                 <a:solidFill>
                   <a:srgbClr val="000000"/>
@@ -4972,7 +5071,7 @@
 </p:notes>
 </file>
 
-<file path=ppt/notesSlides/notesSlide5.xml><?xml version="1.0" encoding="utf-8"?>
+<file path=ppt/notesSlides/notesSlide6.xml><?xml version="1.0" encoding="utf-8"?>
 <p:notes xmlns:a="http://schemas.openxmlformats.org/drawingml/2006/main" xmlns:r="http://schemas.openxmlformats.org/officeDocument/2006/relationships" xmlns:p="http://schemas.openxmlformats.org/presentationml/2006/main">
   <p:cSld>
     <p:spTree>
@@ -5056,7 +5155,7 @@
 </p:notes>
 </file>
 
-<file path=ppt/notesSlides/notesSlide6.xml><?xml version="1.0" encoding="utf-8"?>
+<file path=ppt/notesSlides/notesSlide7.xml><?xml version="1.0" encoding="utf-8"?>
 <p:notes xmlns:a="http://schemas.openxmlformats.org/drawingml/2006/main" xmlns:r="http://schemas.openxmlformats.org/officeDocument/2006/relationships" xmlns:p="http://schemas.openxmlformats.org/presentationml/2006/main">
   <p:cSld>
     <p:spTree>
@@ -5407,7 +5506,7 @@
 </p:notes>
 </file>
 
-<file path=ppt/notesSlides/notesSlide7.xml><?xml version="1.0" encoding="utf-8"?>
+<file path=ppt/notesSlides/notesSlide8.xml><?xml version="1.0" encoding="utf-8"?>
 <p:notes xmlns:a="http://schemas.openxmlformats.org/drawingml/2006/main" xmlns:r="http://schemas.openxmlformats.org/officeDocument/2006/relationships" xmlns:p="http://schemas.openxmlformats.org/presentationml/2006/main">
   <p:cSld>
     <p:spTree>
@@ -5491,7 +5590,7 @@
 </p:notes>
 </file>
 
-<file path=ppt/notesSlides/notesSlide8.xml><?xml version="1.0" encoding="utf-8"?>
+<file path=ppt/notesSlides/notesSlide9.xml><?xml version="1.0" encoding="utf-8"?>
 <p:notes xmlns:a="http://schemas.openxmlformats.org/drawingml/2006/main" xmlns:r="http://schemas.openxmlformats.org/officeDocument/2006/relationships" xmlns:p="http://schemas.openxmlformats.org/presentationml/2006/main">
   <p:cSld>
     <p:spTree>
@@ -5722,7 +5821,7 @@
           <a:p>
             <a:fld id="{12CA9894-3BF6-4A35-BF81-E2CAC0244B39}" type="datetimeFigureOut">
               <a:rPr lang="zh-CN" altLang="en-US" smtClean="0"/>
-              <a:t>2025/6/3</a:t>
+              <a:t>2025/6/26</a:t>
             </a:fld>
             <a:endParaRPr lang="zh-CN" altLang="en-US"/>
           </a:p>
@@ -5920,7 +6019,7 @@
           <a:p>
             <a:fld id="{12CA9894-3BF6-4A35-BF81-E2CAC0244B39}" type="datetimeFigureOut">
               <a:rPr lang="zh-CN" altLang="en-US" smtClean="0"/>
-              <a:t>2025/6/3</a:t>
+              <a:t>2025/6/26</a:t>
             </a:fld>
             <a:endParaRPr lang="zh-CN" altLang="en-US"/>
           </a:p>
@@ -6128,7 +6227,7 @@
           <a:p>
             <a:fld id="{12CA9894-3BF6-4A35-BF81-E2CAC0244B39}" type="datetimeFigureOut">
               <a:rPr lang="zh-CN" altLang="en-US" smtClean="0"/>
-              <a:t>2025/6/3</a:t>
+              <a:t>2025/6/26</a:t>
             </a:fld>
             <a:endParaRPr lang="zh-CN" altLang="en-US"/>
           </a:p>
@@ -6326,7 +6425,7 @@
           <a:p>
             <a:fld id="{12CA9894-3BF6-4A35-BF81-E2CAC0244B39}" type="datetimeFigureOut">
               <a:rPr lang="zh-CN" altLang="en-US" smtClean="0"/>
-              <a:t>2025/6/3</a:t>
+              <a:t>2025/6/26</a:t>
             </a:fld>
             <a:endParaRPr lang="zh-CN" altLang="en-US"/>
           </a:p>
@@ -6601,7 +6700,7 @@
           <a:p>
             <a:fld id="{12CA9894-3BF6-4A35-BF81-E2CAC0244B39}" type="datetimeFigureOut">
               <a:rPr lang="zh-CN" altLang="en-US" smtClean="0"/>
-              <a:t>2025/6/3</a:t>
+              <a:t>2025/6/26</a:t>
             </a:fld>
             <a:endParaRPr lang="zh-CN" altLang="en-US"/>
           </a:p>
@@ -6866,7 +6965,7 @@
           <a:p>
             <a:fld id="{12CA9894-3BF6-4A35-BF81-E2CAC0244B39}" type="datetimeFigureOut">
               <a:rPr lang="zh-CN" altLang="en-US" smtClean="0"/>
-              <a:t>2025/6/3</a:t>
+              <a:t>2025/6/26</a:t>
             </a:fld>
             <a:endParaRPr lang="zh-CN" altLang="en-US"/>
           </a:p>
@@ -7278,7 +7377,7 @@
           <a:p>
             <a:fld id="{12CA9894-3BF6-4A35-BF81-E2CAC0244B39}" type="datetimeFigureOut">
               <a:rPr lang="zh-CN" altLang="en-US" smtClean="0"/>
-              <a:t>2025/6/3</a:t>
+              <a:t>2025/6/26</a:t>
             </a:fld>
             <a:endParaRPr lang="zh-CN" altLang="en-US"/>
           </a:p>
@@ -7419,7 +7518,7 @@
           <a:p>
             <a:fld id="{12CA9894-3BF6-4A35-BF81-E2CAC0244B39}" type="datetimeFigureOut">
               <a:rPr lang="zh-CN" altLang="en-US" smtClean="0"/>
-              <a:t>2025/6/3</a:t>
+              <a:t>2025/6/26</a:t>
             </a:fld>
             <a:endParaRPr lang="zh-CN" altLang="en-US"/>
           </a:p>
@@ -7532,7 +7631,7 @@
           <a:p>
             <a:fld id="{12CA9894-3BF6-4A35-BF81-E2CAC0244B39}" type="datetimeFigureOut">
               <a:rPr lang="zh-CN" altLang="en-US" smtClean="0"/>
-              <a:t>2025/6/3</a:t>
+              <a:t>2025/6/26</a:t>
             </a:fld>
             <a:endParaRPr lang="zh-CN" altLang="en-US"/>
           </a:p>
@@ -7843,7 +7942,7 @@
           <a:p>
             <a:fld id="{12CA9894-3BF6-4A35-BF81-E2CAC0244B39}" type="datetimeFigureOut">
               <a:rPr lang="zh-CN" altLang="en-US" smtClean="0"/>
-              <a:t>2025/6/3</a:t>
+              <a:t>2025/6/26</a:t>
             </a:fld>
             <a:endParaRPr lang="zh-CN" altLang="en-US"/>
           </a:p>
@@ -8131,7 +8230,7 @@
           <a:p>
             <a:fld id="{12CA9894-3BF6-4A35-BF81-E2CAC0244B39}" type="datetimeFigureOut">
               <a:rPr lang="zh-CN" altLang="en-US" smtClean="0"/>
-              <a:t>2025/6/3</a:t>
+              <a:t>2025/6/26</a:t>
             </a:fld>
             <a:endParaRPr lang="zh-CN" altLang="en-US"/>
           </a:p>
@@ -8372,7 +8471,7 @@
           <a:p>
             <a:fld id="{12CA9894-3BF6-4A35-BF81-E2CAC0244B39}" type="datetimeFigureOut">
               <a:rPr lang="zh-CN" altLang="en-US" smtClean="0"/>
-              <a:t>2025/6/3</a:t>
+              <a:t>2025/6/26</a:t>
             </a:fld>
             <a:endParaRPr lang="zh-CN" altLang="en-US"/>
           </a:p>
@@ -12905,7 +13004,7 @@
           <p:nvPr/>
         </p:nvPicPr>
         <p:blipFill>
-          <a:blip r:embed="rId2"/>
+          <a:blip r:embed="rId3"/>
           <a:stretch>
             <a:fillRect/>
           </a:stretch>
@@ -21519,6 +21618,54 @@
                 <a:cs typeface="Times New Roman" panose="02020603050405020304" pitchFamily="18" charset="0"/>
               </a:rPr>
               <a:t>访问其配置空间的一种实现</a:t>
+            </a:r>
+            <a:endParaRPr lang="zh-CN" altLang="en-US" dirty="0">
+              <a:latin typeface="Times New Roman" panose="02020603050405020304" pitchFamily="18" charset="0"/>
+              <a:ea typeface="宋体" panose="02010600030101010101" pitchFamily="2" charset="-122"/>
+              <a:cs typeface="Times New Roman" panose="02020603050405020304" pitchFamily="18" charset="0"/>
+            </a:endParaRPr>
+          </a:p>
+        </p:txBody>
+      </p:sp>
+      <p:sp>
+        <p:nvSpPr>
+          <p:cNvPr id="2" name="文本框 1">
+            <a:extLst>
+              <a:ext uri="{FF2B5EF4-FFF2-40B4-BE49-F238E27FC236}">
+                <a16:creationId xmlns:a16="http://schemas.microsoft.com/office/drawing/2014/main" id="{2D0AC7B9-3A64-B3F2-040A-57C283E21D7F}"/>
+              </a:ext>
+            </a:extLst>
+          </p:cNvPr>
+          <p:cNvSpPr txBox="1"/>
+          <p:nvPr/>
+        </p:nvSpPr>
+        <p:spPr>
+          <a:xfrm>
+            <a:off x="55828" y="3390900"/>
+            <a:ext cx="5984341" cy="369332"/>
+          </a:xfrm>
+          <a:prstGeom prst="rect">
+            <a:avLst/>
+          </a:prstGeom>
+          <a:noFill/>
+        </p:spPr>
+        <p:txBody>
+          <a:bodyPr wrap="square" rtlCol="0">
+            <a:spAutoFit/>
+          </a:bodyPr>
+          <a:lstStyle/>
+          <a:p>
+            <a:r>
+              <a:rPr lang="en-US" altLang="zh-CN" b="0" i="0" dirty="0">
+                <a:solidFill>
+                  <a:srgbClr val="191B1F"/>
+                </a:solidFill>
+                <a:effectLst/>
+                <a:latin typeface="Times New Roman" panose="02020603050405020304" pitchFamily="18" charset="0"/>
+                <a:ea typeface="宋体" panose="02010600030101010101" pitchFamily="2" charset="-122"/>
+                <a:cs typeface="Times New Roman" panose="02020603050405020304" pitchFamily="18" charset="0"/>
+              </a:rPr>
+              <a:t>ECAM region</a:t>
             </a:r>
             <a:endParaRPr lang="zh-CN" altLang="en-US" dirty="0">
               <a:latin typeface="Times New Roman" panose="02020603050405020304" pitchFamily="18" charset="0"/>
@@ -33239,7 +33386,7 @@
                 <a:ea typeface="华文宋体" panose="02010600040101010101" pitchFamily="2" charset="-122"/>
                 <a:cs typeface="Times New Roman" panose="02020603050405020304" pitchFamily="18" charset="0"/>
               </a:rPr>
-              <a:t>对界时， 需要使用字节使能字段， 即 “ </a:t>
+              <a:t>对界时， 需要使用字节使能字段， 即“ </a:t>
             </a:r>
             <a:r>
               <a:rPr lang="en-US" altLang="zh-CN" sz="1800" b="0" i="0" dirty="0">
